--- a/analysis/submitted_analyses/fixation_process.pptx
+++ b/analysis/submitted_analyses/fixation_process.pptx
@@ -197,7 +197,7 @@
           <a:p>
             <a:fld id="{9C6F0873-8CB7-504D-9864-58FDE15F938D}" type="datetimeFigureOut">
               <a:rPr lang="en-US" smtClean="0"/>
-              <a:t>6/18/24</a:t>
+              <a:t>7/2/24</a:t>
             </a:fld>
             <a:endParaRPr lang="en-US"/>
           </a:p>
@@ -679,7 +679,7 @@
           <a:p>
             <a:fld id="{CFC60B5F-2253-DF41-8690-61B53F1555CE}" type="datetimeFigureOut">
               <a:rPr lang="en-US" smtClean="0"/>
-              <a:t>6/18/24</a:t>
+              <a:t>7/2/24</a:t>
             </a:fld>
             <a:endParaRPr lang="en-US"/>
           </a:p>
@@ -849,7 +849,7 @@
           <a:p>
             <a:fld id="{CFC60B5F-2253-DF41-8690-61B53F1555CE}" type="datetimeFigureOut">
               <a:rPr lang="en-US" smtClean="0"/>
-              <a:t>6/18/24</a:t>
+              <a:t>7/2/24</a:t>
             </a:fld>
             <a:endParaRPr lang="en-US"/>
           </a:p>
@@ -1029,7 +1029,7 @@
           <a:p>
             <a:fld id="{CFC60B5F-2253-DF41-8690-61B53F1555CE}" type="datetimeFigureOut">
               <a:rPr lang="en-US" smtClean="0"/>
-              <a:t>6/18/24</a:t>
+              <a:t>7/2/24</a:t>
             </a:fld>
             <a:endParaRPr lang="en-US"/>
           </a:p>
@@ -1199,7 +1199,7 @@
           <a:p>
             <a:fld id="{CFC60B5F-2253-DF41-8690-61B53F1555CE}" type="datetimeFigureOut">
               <a:rPr lang="en-US" smtClean="0"/>
-              <a:t>6/18/24</a:t>
+              <a:t>7/2/24</a:t>
             </a:fld>
             <a:endParaRPr lang="en-US"/>
           </a:p>
@@ -1443,7 +1443,7 @@
           <a:p>
             <a:fld id="{CFC60B5F-2253-DF41-8690-61B53F1555CE}" type="datetimeFigureOut">
               <a:rPr lang="en-US" smtClean="0"/>
-              <a:t>6/18/24</a:t>
+              <a:t>7/2/24</a:t>
             </a:fld>
             <a:endParaRPr lang="en-US"/>
           </a:p>
@@ -1675,7 +1675,7 @@
           <a:p>
             <a:fld id="{CFC60B5F-2253-DF41-8690-61B53F1555CE}" type="datetimeFigureOut">
               <a:rPr lang="en-US" smtClean="0"/>
-              <a:t>6/18/24</a:t>
+              <a:t>7/2/24</a:t>
             </a:fld>
             <a:endParaRPr lang="en-US"/>
           </a:p>
@@ -2042,7 +2042,7 @@
           <a:p>
             <a:fld id="{CFC60B5F-2253-DF41-8690-61B53F1555CE}" type="datetimeFigureOut">
               <a:rPr lang="en-US" smtClean="0"/>
-              <a:t>6/18/24</a:t>
+              <a:t>7/2/24</a:t>
             </a:fld>
             <a:endParaRPr lang="en-US"/>
           </a:p>
@@ -2160,7 +2160,7 @@
           <a:p>
             <a:fld id="{CFC60B5F-2253-DF41-8690-61B53F1555CE}" type="datetimeFigureOut">
               <a:rPr lang="en-US" smtClean="0"/>
-              <a:t>6/18/24</a:t>
+              <a:t>7/2/24</a:t>
             </a:fld>
             <a:endParaRPr lang="en-US"/>
           </a:p>
@@ -2255,7 +2255,7 @@
           <a:p>
             <a:fld id="{CFC60B5F-2253-DF41-8690-61B53F1555CE}" type="datetimeFigureOut">
               <a:rPr lang="en-US" smtClean="0"/>
-              <a:t>6/18/24</a:t>
+              <a:t>7/2/24</a:t>
             </a:fld>
             <a:endParaRPr lang="en-US"/>
           </a:p>
@@ -2532,7 +2532,7 @@
           <a:p>
             <a:fld id="{CFC60B5F-2253-DF41-8690-61B53F1555CE}" type="datetimeFigureOut">
               <a:rPr lang="en-US" smtClean="0"/>
-              <a:t>6/18/24</a:t>
+              <a:t>7/2/24</a:t>
             </a:fld>
             <a:endParaRPr lang="en-US"/>
           </a:p>
@@ -2789,7 +2789,7 @@
           <a:p>
             <a:fld id="{CFC60B5F-2253-DF41-8690-61B53F1555CE}" type="datetimeFigureOut">
               <a:rPr lang="en-US" smtClean="0"/>
-              <a:t>6/18/24</a:t>
+              <a:t>7/2/24</a:t>
             </a:fld>
             <a:endParaRPr lang="en-US"/>
           </a:p>
@@ -3002,7 +3002,7 @@
           <a:p>
             <a:fld id="{CFC60B5F-2253-DF41-8690-61B53F1555CE}" type="datetimeFigureOut">
               <a:rPr lang="en-US" smtClean="0"/>
-              <a:t>6/18/24</a:t>
+              <a:t>7/2/24</a:t>
             </a:fld>
             <a:endParaRPr lang="en-US"/>
           </a:p>
@@ -3641,36 +3641,6 @@
           </a:fontRef>
         </p:style>
       </p:cxnSp>
-      <p:pic>
-        <p:nvPicPr>
-          <p:cNvPr id="10" name="Picture 9">
-            <a:extLst>
-              <a:ext uri="{FF2B5EF4-FFF2-40B4-BE49-F238E27FC236}">
-                <a16:creationId xmlns:a16="http://schemas.microsoft.com/office/drawing/2014/main" id="{D5A589FB-F1A1-80B5-E355-077488820BB6}"/>
-              </a:ext>
-            </a:extLst>
-          </p:cNvPr>
-          <p:cNvPicPr>
-            <a:picLocks noChangeAspect="1"/>
-          </p:cNvPicPr>
-          <p:nvPr/>
-        </p:nvPicPr>
-        <p:blipFill>
-          <a:blip r:embed="rId8"/>
-          <a:stretch>
-            <a:fillRect/>
-          </a:stretch>
-        </p:blipFill>
-        <p:spPr>
-          <a:xfrm>
-            <a:off x="0" y="11421070"/>
-            <a:ext cx="5486400" cy="3657600"/>
-          </a:xfrm>
-          <a:prstGeom prst="rect">
-            <a:avLst/>
-          </a:prstGeom>
-        </p:spPr>
-      </p:pic>
       <p:sp>
         <p:nvSpPr>
           <p:cNvPr id="2" name="TextBox 1">
@@ -3722,7 +3692,7 @@
           <p:nvPr/>
         </p:nvPicPr>
         <p:blipFill>
-          <a:blip r:embed="rId9"/>
+          <a:blip r:embed="rId8"/>
           <a:stretch>
             <a:fillRect/>
           </a:stretch>
@@ -3905,36 +3875,6 @@
           </a:fontRef>
         </p:style>
       </p:cxnSp>
-      <p:pic>
-        <p:nvPicPr>
-          <p:cNvPr id="29" name="Picture 28">
-            <a:extLst>
-              <a:ext uri="{FF2B5EF4-FFF2-40B4-BE49-F238E27FC236}">
-                <a16:creationId xmlns:a16="http://schemas.microsoft.com/office/drawing/2014/main" id="{3BD1A4B7-EE1A-F7AD-DC34-D92F5FE1BD0F}"/>
-              </a:ext>
-            </a:extLst>
-          </p:cNvPr>
-          <p:cNvPicPr>
-            <a:picLocks noChangeAspect="1"/>
-          </p:cNvPicPr>
-          <p:nvPr/>
-        </p:nvPicPr>
-        <p:blipFill>
-          <a:blip r:embed="rId10"/>
-          <a:stretch>
-            <a:fillRect/>
-          </a:stretch>
-        </p:blipFill>
-        <p:spPr>
-          <a:xfrm>
-            <a:off x="10972800" y="11421070"/>
-            <a:ext cx="5486400" cy="3657600"/>
-          </a:xfrm>
-          <a:prstGeom prst="rect">
-            <a:avLst/>
-          </a:prstGeom>
-        </p:spPr>
-      </p:pic>
       <p:sp>
         <p:nvSpPr>
           <p:cNvPr id="34" name="TextBox 33">
@@ -4282,7 +4222,7 @@
           <p:nvPr/>
         </p:nvPicPr>
         <p:blipFill>
-          <a:blip r:embed="rId11"/>
+          <a:blip r:embed="rId9"/>
           <a:stretch>
             <a:fillRect/>
           </a:stretch>
@@ -4312,7 +4252,7 @@
           <p:nvPr/>
         </p:nvPicPr>
         <p:blipFill>
-          <a:blip r:embed="rId12"/>
+          <a:blip r:embed="rId10"/>
           <a:stretch>
             <a:fillRect/>
           </a:stretch>
@@ -4342,7 +4282,7 @@
           <p:nvPr/>
         </p:nvPicPr>
         <p:blipFill>
-          <a:blip r:embed="rId13"/>
+          <a:blip r:embed="rId11"/>
           <a:stretch>
             <a:fillRect/>
           </a:stretch>
@@ -4350,36 +4290,6 @@
         <p:spPr>
           <a:xfrm>
             <a:off x="10972800" y="7762913"/>
-            <a:ext cx="5486400" cy="3657600"/>
-          </a:xfrm>
-          <a:prstGeom prst="rect">
-            <a:avLst/>
-          </a:prstGeom>
-        </p:spPr>
-      </p:pic>
-      <p:pic>
-        <p:nvPicPr>
-          <p:cNvPr id="46" name="Picture 45">
-            <a:extLst>
-              <a:ext uri="{FF2B5EF4-FFF2-40B4-BE49-F238E27FC236}">
-                <a16:creationId xmlns:a16="http://schemas.microsoft.com/office/drawing/2014/main" id="{4F149E98-57F2-A57B-7CC5-E951A79793EB}"/>
-              </a:ext>
-            </a:extLst>
-          </p:cNvPr>
-          <p:cNvPicPr>
-            <a:picLocks noChangeAspect="1"/>
-          </p:cNvPicPr>
-          <p:nvPr/>
-        </p:nvPicPr>
-        <p:blipFill>
-          <a:blip r:embed="rId14"/>
-          <a:stretch>
-            <a:fillRect/>
-          </a:stretch>
-        </p:blipFill>
-        <p:spPr>
-          <a:xfrm>
-            <a:off x="5486400" y="11429377"/>
             <a:ext cx="5486400" cy="3657600"/>
           </a:xfrm>
           <a:prstGeom prst="rect">
@@ -4402,7 +4312,7 @@
           <p:nvPr/>
         </p:nvPicPr>
         <p:blipFill>
-          <a:blip r:embed="rId15"/>
+          <a:blip r:embed="rId12"/>
           <a:stretch>
             <a:fillRect/>
           </a:stretch>
@@ -4432,7 +4342,7 @@
           <p:nvPr/>
         </p:nvPicPr>
         <p:blipFill>
-          <a:blip r:embed="rId16"/>
+          <a:blip r:embed="rId13"/>
           <a:stretch>
             <a:fillRect/>
           </a:stretch>
@@ -4462,6 +4372,96 @@
           <p:nvPr/>
         </p:nvPicPr>
         <p:blipFill>
+          <a:blip r:embed="rId14"/>
+          <a:stretch>
+            <a:fillRect/>
+          </a:stretch>
+        </p:blipFill>
+        <p:spPr>
+          <a:xfrm>
+            <a:off x="0" y="15087600"/>
+            <a:ext cx="5486400" cy="3657600"/>
+          </a:xfrm>
+          <a:prstGeom prst="rect">
+            <a:avLst/>
+          </a:prstGeom>
+        </p:spPr>
+      </p:pic>
+      <p:pic>
+        <p:nvPicPr>
+          <p:cNvPr id="6" name="Picture 5">
+            <a:extLst>
+              <a:ext uri="{FF2B5EF4-FFF2-40B4-BE49-F238E27FC236}">
+                <a16:creationId xmlns:a16="http://schemas.microsoft.com/office/drawing/2014/main" id="{86662BCC-E25A-EA80-6C70-A05A6760BA9D}"/>
+              </a:ext>
+            </a:extLst>
+          </p:cNvPr>
+          <p:cNvPicPr>
+            <a:picLocks noChangeAspect="1"/>
+          </p:cNvPicPr>
+          <p:nvPr/>
+        </p:nvPicPr>
+        <p:blipFill>
+          <a:blip r:embed="rId15"/>
+          <a:stretch>
+            <a:fillRect/>
+          </a:stretch>
+        </p:blipFill>
+        <p:spPr>
+          <a:xfrm>
+            <a:off x="0" y="11432341"/>
+            <a:ext cx="5486400" cy="3657600"/>
+          </a:xfrm>
+          <a:prstGeom prst="rect">
+            <a:avLst/>
+          </a:prstGeom>
+        </p:spPr>
+      </p:pic>
+      <p:pic>
+        <p:nvPicPr>
+          <p:cNvPr id="8" name="Picture 7">
+            <a:extLst>
+              <a:ext uri="{FF2B5EF4-FFF2-40B4-BE49-F238E27FC236}">
+                <a16:creationId xmlns:a16="http://schemas.microsoft.com/office/drawing/2014/main" id="{C0F48825-3AD6-9342-A036-04E55B78F7DF}"/>
+              </a:ext>
+            </a:extLst>
+          </p:cNvPr>
+          <p:cNvPicPr>
+            <a:picLocks noChangeAspect="1"/>
+          </p:cNvPicPr>
+          <p:nvPr/>
+        </p:nvPicPr>
+        <p:blipFill>
+          <a:blip r:embed="rId16"/>
+          <a:stretch>
+            <a:fillRect/>
+          </a:stretch>
+        </p:blipFill>
+        <p:spPr>
+          <a:xfrm>
+            <a:off x="5486400" y="11442729"/>
+            <a:ext cx="5486400" cy="3657600"/>
+          </a:xfrm>
+          <a:prstGeom prst="rect">
+            <a:avLst/>
+          </a:prstGeom>
+        </p:spPr>
+      </p:pic>
+      <p:pic>
+        <p:nvPicPr>
+          <p:cNvPr id="15" name="Picture 14">
+            <a:extLst>
+              <a:ext uri="{FF2B5EF4-FFF2-40B4-BE49-F238E27FC236}">
+                <a16:creationId xmlns:a16="http://schemas.microsoft.com/office/drawing/2014/main" id="{7644524D-42F9-9591-49AB-F3E94CB0105E}"/>
+              </a:ext>
+            </a:extLst>
+          </p:cNvPr>
+          <p:cNvPicPr>
+            <a:picLocks noChangeAspect="1"/>
+          </p:cNvPicPr>
+          <p:nvPr/>
+        </p:nvPicPr>
+        <p:blipFill>
           <a:blip r:embed="rId17"/>
           <a:stretch>
             <a:fillRect/>
@@ -4469,7 +4469,7 @@
         </p:blipFill>
         <p:spPr>
           <a:xfrm>
-            <a:off x="0" y="15087600"/>
+            <a:off x="10972800" y="11419612"/>
             <a:ext cx="5486400" cy="3657600"/>
           </a:xfrm>
           <a:prstGeom prst="rect">
